--- a/uploads/pdf/presentation-exemple.pptx
+++ b/uploads/pdf/presentation-exemple.pptx
@@ -508,7 +508,7 @@
           <a:lstStyle/>
           <a:p>
             <a:r>
-              <a:t>Rappeler que la présentation se lit directement dans le navigateur, sans PowerPoint installé.</a:t>
+              <a:t>La présentation se lit directement dans le navigateur, sans PowerPoint installé.</a:t>
             </a:r>
           </a:p>
         </p:txBody>
@@ -3621,7 +3621,7 @@
           <a:lstStyle/>
           <a:p>
             <a:r>
-              <a:t>La Bibliothèque Numérique — présentation de démonstration</a:t>
+              <a:t>La Bibliothèque Numérique · présentation de démonstration</a:t>
             </a:r>
           </a:p>
         </p:txBody>
